--- a/aulas/desenvolvimento-normal-2-anos-puberdade/deck/Desenvolvimento-normal-2a-puberdade_PsiquiatriaPratica.pptx
+++ b/aulas/desenvolvimento-normal-2-anos-puberdade/deck/Desenvolvimento-normal-2a-puberdade_PsiquiatriaPratica.pptx
@@ -1969,7 +1969,7 @@
           <a:p>
             <a:r>
               <a:rPr lang="en-US" dirty="0"/>
-              <a:t>Preditores: faz de conta compartilhado, memória de trabalho e LINGUAGEM (limiar linguístico para passar em crença falsa). Velocidade de aquisição prediz habilidade social futura.</a:t>
+              <a:t>Preditores: faz de conta compartilhado, memória de trabalho e LINGUAGEM (limiar linguístico para passar em crença falsa). Velocidade de aquisição prediz habilidade social futura. Nuance no apêndice C: a transição é gradual (Wellman), sem idade-muro.</a:t>
             </a:r>
             <a:endParaRPr lang="en-US" dirty="0"/>
           </a:p>
@@ -3377,7 +3377,7 @@
           <a:p>
             <a:r>
               <a:rPr lang="en-US" dirty="0"/>
-              <a:t>[APOSTA] ANTES de mostrar: 'por que a fila do TDAH no ambulatório começa aos 6, e não aos 4?'. Colher palpites, revelar. Frase para levar: a demanda subiu antes de o freio ficar pronto. O freio já era imaturo aos 4; aos 4 ninguém precisava dele.</a:t>
+              <a:t>[APOSTA] ANTES de mostrar: 'por que a fila do TDAH no ambulatório começa aos 6, e não aos 4?'. Colher palpites, revelar. Frase para levar: a demanda subiu antes de o freio ficar pronto. O freio já era imaturo aos 4; aos 4 ninguém precisava dele. Duas ressalvas de fala (detalhadas no apêndice B): o vão explica QUANDO chega à consulta, não O QUE o TDAH é; e o mesmo vão produz falsos positivos (efeito de idade relativa).</a:t>
             </a:r>
             <a:endParaRPr lang="en-US" dirty="0"/>
           </a:p>
@@ -5489,7 +5489,7 @@
           <a:p>
             <a:r>
               <a:rPr lang="en-US" dirty="0"/>
-              <a:t>Fim. Agradecer e apontar o documento de apoio.</a:t>
+              <a:t>Fim. Agradecer e apontar o documento de apoio. Perguntas da plateia: saltar para o apêndice D (respostas prontas) quando houver slide correspondente.</a:t>
             </a:r>
             <a:endParaRPr lang="en-US" dirty="0"/>
           </a:p>

--- a/aulas/desenvolvimento-normal-2-anos-puberdade/deck/Desenvolvimento-normal-2a-puberdade_PsiquiatriaPratica.pptx
+++ b/aulas/desenvolvimento-normal-2-anos-puberdade/deck/Desenvolvimento-normal-2a-puberdade_PsiquiatriaPratica.pptx
@@ -1001,7 +1001,7 @@
           <a:p>
             <a:r>
               <a:rPr lang="en-US" dirty="0"/>
-              <a:t>A pergunta 'o que ela obteve?' prepara a gênese do TOD no Ato 2. Plantar sem colher ainda.</a:t>
+              <a:t>A pergunta 'o que ela obteve?' prepara a contracena do Ato 2. Plantar sem colher ainda. Ressalva de fala: UM episódio gera hipótese; análise funcional de verdade exige padrão em várias ocorrências (apêndice A).</a:t>
             </a:r>
             <a:endParaRPr lang="en-US" dirty="0"/>
           </a:p>
@@ -1969,7 +1969,7 @@
           <a:p>
             <a:r>
               <a:rPr lang="en-US" dirty="0"/>
-              <a:t>Preditores: faz de conta compartilhado, memória de trabalho e LINGUAGEM (limiar linguístico para passar em crença falsa). Velocidade de aquisição prediz habilidade social futura. Nuance no apêndice C: a transição é gradual (Wellman), sem idade-muro.</a:t>
+              <a:t>Preditores: faz de conta compartilhado, memória de trabalho e LINGUAGEM (limiar linguístico para passar em crença falsa). Velocidade de aquisição prediz habilidade social futura. Nuance no apêndice C: a transição é gradual (Wellman), sem idade-muro; criança de 4 que erra não está atrasada por isso.</a:t>
             </a:r>
             <a:endParaRPr lang="en-US" dirty="0"/>
           </a:p>
@@ -2585,7 +2585,7 @@
           <a:p>
             <a:r>
               <a:rPr lang="en-US" dirty="0"/>
-              <a:t>Gênese funcional: oposição é comportamento operante. Quando resistir desliga a ordem (reforço negativo) ou captura o adulto (reforço positivo), a oposição é selecionada. Pergunta clínica: 'o que a oposição PRODUZ nesta casa?'. Contraste: o desafio aberto normalmente DECLINA dos 2 aos 6.</a:t>
+              <a:t>Gênese funcional: oposição é comportamento operante, sem intenção consciente e sem vilão. Quando resistir desliga a ordem (reforço negativo) ou captura o adulto (reforço positivo), a oposição é selecionada. Ressalva obrigatória: fator de risco e de manutenção, NÃO causa suficiente (temperamento e carga familiar entram na equação; apêndice A). Pergunta clínica: 'o que a oposição PRODUZ nesta casa?'. Contraste: o desafio aberto normalmente DECLINA dos 2 aos 6.</a:t>
             </a:r>
             <a:endParaRPr lang="en-US" dirty="0"/>
           </a:p>
@@ -3201,7 +3201,7 @@
           <a:p>
             <a:r>
               <a:rPr lang="en-US" dirty="0"/>
-              <a:t>Se perguntarem 'Piaget não foi superado?': os fenômenos replicam; a explicação mudou (Siegler: regras adquiridas por experiência + processamento). Mapa sim, mecanismo não.</a:t>
+              <a:t>Se perguntarem 'Piaget não foi superado?': os fenômenos replicam; a explicação mudou (Siegler: regras adquiridas por experiência + processamento). Mapa sim, mecanismo não. Nota de fonte: massa 7 / peso 8 / volume 11 é a sequência do Bee &amp; Boyd p. 241 (Tomlinson-Keasey); parte da literatura situa peso perto dos 9.</a:t>
             </a:r>
             <a:endParaRPr lang="en-US" dirty="0"/>
           </a:p>
@@ -3729,7 +3729,7 @@
           <a:p>
             <a:r>
               <a:rPr lang="en-US" dirty="0"/>
-              <a:t>O que continua valendo: a melhor IMAGEM do freio imaturo em ação (as estratégias de distração SÃO autorregulação nascente). O que morreu: o oráculo. Ensinar o residente a citar sem folclore.</a:t>
+              <a:t>O que continua valendo: a melhor IMAGEM do freio imaturo em ação (as estratégias de distração SÃO autorregulação nascente). O que morreu: o oráculo. Precisão para a fala: com controles completos de família e cognição precoce, a maior parte do efeito desaparece (não significativo em vários modelos de Watts 2018); evitar fração fixa.</a:t>
             </a:r>
             <a:endParaRPr lang="en-US" dirty="0"/>
           </a:p>
@@ -4609,7 +4609,7 @@
           <a:p>
             <a:r>
               <a:rPr lang="en-US" dirty="0"/>
-              <a:t>Status sociométrico: comportamento social pesa mais que aparência (Rodkin 2013).</a:t>
+              <a:t>Status sociométrico: comportamento social pesa mais que aparência (Rodkin 2013). Ressalva de fala sobre Eisenberger: achado clássico e útil como ILUSTRAÇÃO, mas a leitura 'mesma área = mesmo mecanismo' foi questionada por análises multivariadas posteriores; não usar como prova de identidade neural.</a:t>
             </a:r>
             <a:endParaRPr lang="en-US" dirty="0"/>
           </a:p>
@@ -5577,7 +5577,7 @@
           <a:p>
             <a:r>
               <a:rPr lang="en-US" dirty="0"/>
-              <a:t>Superregularização ('fazi', 'sabo') é sinal de saúde: a criança extraiu a regra e aplicou demais. Erro que denuncia inteligência do sistema.</a:t>
+              <a:t>Superregularização ('fazi', 'sabo') é sinal de saúde: a criança extraiu a regra e aplicou demais. Erro que denuncia inteligência do sistema. Ressalva de fala: 600 e 15.000 são MÉDIAS com variação individual enorme; não usar como marco de alarme isolado.</a:t>
             </a:r>
             <a:endParaRPr lang="en-US" dirty="0"/>
           </a:p>
@@ -8065,7 +8065,7 @@
                 <a:ea typeface="Georgia" pitchFamily="34" charset="-122"/>
                 <a:cs typeface="Georgia" pitchFamily="34" charset="-120"/>
               </a:rPr>
-              <a:t>Toda birra tem gramática (gatilho, escalada, função), e ler essa gramática se chama análise funcional.</a:t>
+              <a:t>Toda birra tem gramática (gatilho, escalada, função), e ler essa gramática é o primeiro passo da análise funcional.</a:t>
             </a:r>
             <a:endParaRPr lang="en-US" sz="2100" dirty="0"/>
           </a:p>
@@ -9950,7 +9950,7 @@
                 <a:ea typeface="Calibri" pitchFamily="34" charset="-122"/>
                 <a:cs typeface="Calibri" pitchFamily="34" charset="-120"/>
               </a:rPr>
-              <a:t>atenção compartilhada / M-CHAT · janela do segundo ano</a:t>
+              <a:t>atenção compartilhada · M-CHAT-R (Modified Checklist for Autism in Toddlers, rastreio 16-30 meses)</a:t>
             </a:r>
             <a:endParaRPr lang="en-US" sz="1100" dirty="0"/>
           </a:p>
@@ -12312,7 +12312,7 @@
                 <a:ea typeface="Calibri" pitchFamily="34" charset="-122"/>
                 <a:cs typeface="Calibri" pitchFamily="34" charset="-120"/>
               </a:rPr>
-              <a:t>Votem: com que idade a criança passa a acertar? 2, 3, 4 ou 6?</a:t>
+              <a:t>Votem: com que idade a MAIORIA das crianças passa a acertar? 2, 3, 4 ou 6?</a:t>
             </a:r>
             <a:endParaRPr lang="en-US" sz="1350" dirty="0"/>
           </a:p>
@@ -12773,7 +12773,7 @@
               <a:buNone/>
             </a:pPr>
             <a:r>
-              <a:rPr lang="en-US" sz="2300" b="1" dirty="0">
+              <a:rPr lang="en-US" sz="2100" b="1" dirty="0">
                 <a:solidFill>
                   <a:srgbClr val="56365F"/>
                 </a:solidFill>
@@ -12781,9 +12781,9 @@
                 <a:ea typeface="Georgia" pitchFamily="34" charset="-122"/>
                 <a:cs typeface="Georgia" pitchFamily="34" charset="-120"/>
               </a:rPr>
-              <a:t>Aos 3 a criança erra, aos 4-5 acerta, e o padrão se repete em toda cultura testada.</a:t>
-            </a:r>
-            <a:endParaRPr lang="en-US" sz="2300" dirty="0"/>
+              <a:t>Aos 3 a maioria erra, aos 5 a maioria acerta, e o padrão se repete em toda cultura testada.</a:t>
+            </a:r>
+            <a:endParaRPr lang="en-US" sz="2100" dirty="0"/>
           </a:p>
         </p:txBody>
       </p:sp>
@@ -12835,8 +12835,8 @@
         </p:nvSpPr>
         <p:spPr>
           <a:xfrm>
-            <a:off x="2194560" y="5029200"/>
-            <a:ext cx="1920240" cy="640080"/>
+            <a:off x="2240280" y="5029200"/>
+            <a:ext cx="1828800" cy="640080"/>
           </a:xfrm>
           <a:prstGeom prst="rect">
             <a:avLst/>
@@ -12852,7 +12852,7 @@
               <a:buNone/>
             </a:pPr>
             <a:r>
-              <a:rPr lang="en-US" sz="1400" b="1" dirty="0">
+              <a:rPr lang="en-US" sz="1250" b="1" dirty="0">
                 <a:solidFill>
                   <a:srgbClr val="56365F"/>
                 </a:solidFill>
@@ -12860,16 +12860,16 @@
                 <a:ea typeface="Calibri" pitchFamily="34" charset="-122"/>
                 <a:cs typeface="Calibri" pitchFamily="34" charset="-120"/>
               </a:rPr>
-              <a:t>3 anos</a:t>
-            </a:r>
-            <a:endParaRPr lang="en-US" sz="1400" dirty="0"/>
+              <a:t>3 anos:</a:t>
+            </a:r>
+            <a:endParaRPr lang="en-US" sz="1250" dirty="0"/>
           </a:p>
           <a:p>
             <a:pPr algn="ctr" indent="0" marL="0">
               <a:buNone/>
             </a:pPr>
             <a:r>
-              <a:rPr lang="en-US" sz="1400" b="1" dirty="0">
+              <a:rPr lang="en-US" sz="1250" b="1" dirty="0">
                 <a:solidFill>
                   <a:srgbClr val="56365F"/>
                 </a:solidFill>
@@ -12877,15 +12877,91 @@
                 <a:ea typeface="Calibri" pitchFamily="34" charset="-122"/>
                 <a:cs typeface="Calibri" pitchFamily="34" charset="-120"/>
               </a:rPr>
-              <a:t>erra</a:t>
-            </a:r>
-            <a:endParaRPr lang="en-US" sz="1400" dirty="0"/>
+              <a:t>a maioria erra</a:t>
+            </a:r>
+            <a:endParaRPr lang="en-US" sz="1250" dirty="0"/>
           </a:p>
         </p:txBody>
       </p:sp>
       <p:sp>
         <p:nvSpPr>
           <p:cNvPr id="8" name="Shape 6"/>
+          <p:cNvSpPr/>
+          <p:nvPr/>
+        </p:nvSpPr>
+        <p:spPr>
+          <a:xfrm>
+            <a:off x="4023360" y="3703320"/>
+            <a:ext cx="1554480" cy="1234440"/>
+          </a:xfrm>
+          <a:prstGeom prst="rect">
+            <a:avLst/>
+          </a:prstGeom>
+          <a:solidFill>
+            <a:srgbClr val="ECB841"/>
+          </a:solidFill>
+          <a:ln/>
+        </p:spPr>
+      </p:sp>
+      <p:sp>
+        <p:nvSpPr>
+          <p:cNvPr id="9" name="Text 7"/>
+          <p:cNvSpPr/>
+          <p:nvPr/>
+        </p:nvSpPr>
+        <p:spPr>
+          <a:xfrm>
+            <a:off x="3886200" y="5029200"/>
+            <a:ext cx="1828800" cy="640080"/>
+          </a:xfrm>
+          <a:prstGeom prst="rect">
+            <a:avLst/>
+          </a:prstGeom>
+          <a:noFill/>
+          <a:ln/>
+        </p:spPr>
+        <p:txBody>
+          <a:bodyPr wrap="square" rtlCol="0" anchor="t"/>
+          <a:lstStyle/>
+          <a:p>
+            <a:pPr algn="ctr" indent="0" marL="0">
+              <a:buNone/>
+            </a:pPr>
+            <a:r>
+              <a:rPr lang="en-US" sz="1250" b="1" dirty="0">
+                <a:solidFill>
+                  <a:srgbClr val="8A6594"/>
+                </a:solidFill>
+                <a:latin typeface="Calibri" pitchFamily="34" charset="0"/>
+                <a:ea typeface="Calibri" pitchFamily="34" charset="-122"/>
+                <a:cs typeface="Calibri" pitchFamily="34" charset="-120"/>
+              </a:rPr>
+              <a:t>4 anos:</a:t>
+            </a:r>
+            <a:endParaRPr lang="en-US" sz="1250" dirty="0"/>
+          </a:p>
+          <a:p>
+            <a:pPr algn="ctr" indent="0" marL="0">
+              <a:buNone/>
+            </a:pPr>
+            <a:r>
+              <a:rPr lang="en-US" sz="1250" b="1" dirty="0">
+                <a:solidFill>
+                  <a:srgbClr val="8A6594"/>
+                </a:solidFill>
+                <a:latin typeface="Calibri" pitchFamily="34" charset="0"/>
+                <a:ea typeface="Calibri" pitchFamily="34" charset="-122"/>
+                <a:cs typeface="Calibri" pitchFamily="34" charset="-120"/>
+              </a:rPr>
+              <a:t>meio a meio</a:t>
+            </a:r>
+            <a:endParaRPr lang="en-US" sz="1250" dirty="0"/>
+          </a:p>
+        </p:txBody>
+      </p:sp>
+      <p:sp>
+        <p:nvSpPr>
+          <p:cNvPr id="10" name="Shape 8"/>
           <p:cNvSpPr/>
           <p:nvPr/>
         </p:nvSpPr>
@@ -12905,7 +12981,7 @@
       </p:sp>
       <p:sp>
         <p:nvSpPr>
-          <p:cNvPr id="9" name="Shape 7"/>
+          <p:cNvPr id="11" name="Shape 9"/>
           <p:cNvSpPr/>
           <p:nvPr/>
         </p:nvSpPr>
@@ -12928,14 +13004,14 @@
       </p:sp>
       <p:sp>
         <p:nvSpPr>
-          <p:cNvPr id="10" name="Text 8"/>
-          <p:cNvSpPr/>
-          <p:nvPr/>
-        </p:nvSpPr>
-        <p:spPr>
-          <a:xfrm>
-            <a:off x="5486400" y="5029200"/>
-            <a:ext cx="1920240" cy="640080"/>
+          <p:cNvPr id="12" name="Text 10"/>
+          <p:cNvSpPr/>
+          <p:nvPr/>
+        </p:nvSpPr>
+        <p:spPr>
+          <a:xfrm>
+            <a:off x="5532120" y="5029200"/>
+            <a:ext cx="1828800" cy="640080"/>
           </a:xfrm>
           <a:prstGeom prst="rect">
             <a:avLst/>
@@ -12951,7 +13027,7 @@
               <a:buNone/>
             </a:pPr>
             <a:r>
-              <a:rPr lang="en-US" sz="1400" b="1" dirty="0">
+              <a:rPr lang="en-US" sz="1250" b="1" dirty="0">
                 <a:solidFill>
                   <a:srgbClr val="B84A1F"/>
                 </a:solidFill>
@@ -12959,16 +13035,16 @@
                 <a:ea typeface="Calibri" pitchFamily="34" charset="-122"/>
                 <a:cs typeface="Calibri" pitchFamily="34" charset="-120"/>
               </a:rPr>
-              <a:t>4-5 anos</a:t>
-            </a:r>
-            <a:endParaRPr lang="en-US" sz="1400" dirty="0"/>
+              <a:t>5 anos:</a:t>
+            </a:r>
+            <a:endParaRPr lang="en-US" sz="1250" dirty="0"/>
           </a:p>
           <a:p>
             <a:pPr algn="ctr" indent="0" marL="0">
               <a:buNone/>
             </a:pPr>
             <a:r>
-              <a:rPr lang="en-US" sz="1400" b="1" dirty="0">
+              <a:rPr lang="en-US" sz="1250" b="1" dirty="0">
                 <a:solidFill>
                   <a:srgbClr val="B84A1F"/>
                 </a:solidFill>
@@ -12976,15 +13052,15 @@
                 <a:ea typeface="Calibri" pitchFamily="34" charset="-122"/>
                 <a:cs typeface="Calibri" pitchFamily="34" charset="-120"/>
               </a:rPr>
-              <a:t>acerta</a:t>
-            </a:r>
-            <a:endParaRPr lang="en-US" sz="1400" dirty="0"/>
-          </a:p>
-        </p:txBody>
-      </p:sp>
-      <p:sp>
-        <p:nvSpPr>
-          <p:cNvPr id="11" name="Shape 9"/>
+              <a:t>a maioria acerta</a:t>
+            </a:r>
+            <a:endParaRPr lang="en-US" sz="1250" dirty="0"/>
+          </a:p>
+        </p:txBody>
+      </p:sp>
+      <p:sp>
+        <p:nvSpPr>
+          <p:cNvPr id="13" name="Shape 11"/>
           <p:cNvSpPr/>
           <p:nvPr/>
         </p:nvSpPr>
@@ -13011,7 +13087,7 @@
       </p:sp>
       <p:sp>
         <p:nvSpPr>
-          <p:cNvPr id="12" name="Text 10"/>
+          <p:cNvPr id="14" name="Text 12"/>
           <p:cNvSpPr/>
           <p:nvPr/>
         </p:nvSpPr>
@@ -13050,7 +13126,7 @@
       </p:sp>
       <p:sp>
         <p:nvSpPr>
-          <p:cNvPr id="13" name="Text 11"/>
+          <p:cNvPr id="15" name="Text 13"/>
           <p:cNvSpPr/>
           <p:nvPr/>
         </p:nvSpPr>
@@ -15628,7 +15704,46 @@
       </p:sp>
       <p:sp>
         <p:nvSpPr>
-          <p:cNvPr id="19" name="Shape 17"/>
+          <p:cNvPr id="19" name="Text 17"/>
+          <p:cNvSpPr/>
+          <p:nvPr/>
+        </p:nvSpPr>
+        <p:spPr>
+          <a:xfrm>
+            <a:off x="1280160" y="5257800"/>
+            <a:ext cx="9601200" cy="320040"/>
+          </a:xfrm>
+          <a:prstGeom prst="rect">
+            <a:avLst/>
+          </a:prstGeom>
+          <a:noFill/>
+          <a:ln/>
+        </p:spPr>
+        <p:txBody>
+          <a:bodyPr wrap="square" rtlCol="0" anchor="t"/>
+          <a:lstStyle/>
+          <a:p>
+            <a:pPr indent="0" marL="0">
+              <a:buNone/>
+            </a:pPr>
+            <a:r>
+              <a:rPr lang="en-US" sz="1200" i="1" dirty="0">
+                <a:solidFill>
+                  <a:srgbClr val="B84A1F"/>
+                </a:solidFill>
+                <a:latin typeface="Calibri" pitchFamily="34" charset="0"/>
+                <a:ea typeface="Calibri" pitchFamily="34" charset="-122"/>
+                <a:cs typeface="Calibri" pitchFamily="34" charset="-120"/>
+              </a:rPr>
+              <a:t>posição no mapa = etapa da transferência que costuma falhar, NÃO idade de início</a:t>
+            </a:r>
+            <a:endParaRPr lang="en-US" sz="1200" dirty="0"/>
+          </a:p>
+        </p:txBody>
+      </p:sp>
+      <p:sp>
+        <p:nvSpPr>
+          <p:cNvPr id="20" name="Shape 18"/>
           <p:cNvSpPr/>
           <p:nvPr/>
         </p:nvSpPr>
@@ -15655,7 +15770,7 @@
       </p:sp>
       <p:sp>
         <p:nvSpPr>
-          <p:cNvPr id="20" name="Shape 18"/>
+          <p:cNvPr id="21" name="Shape 19"/>
           <p:cNvSpPr/>
           <p:nvPr/>
         </p:nvSpPr>
@@ -15675,7 +15790,7 @@
       </p:sp>
       <p:sp>
         <p:nvSpPr>
-          <p:cNvPr id="21" name="Text 19"/>
+          <p:cNvPr id="22" name="Text 20"/>
           <p:cNvSpPr/>
           <p:nvPr/>
         </p:nvSpPr>
@@ -15714,7 +15829,7 @@
       </p:sp>
       <p:sp>
         <p:nvSpPr>
-          <p:cNvPr id="22" name="Text 20"/>
+          <p:cNvPr id="23" name="Text 21"/>
           <p:cNvSpPr/>
           <p:nvPr/>
         </p:nvSpPr>
@@ -15753,7 +15868,7 @@
       </p:sp>
       <p:sp>
         <p:nvSpPr>
-          <p:cNvPr id="23" name="Shape 21"/>
+          <p:cNvPr id="24" name="Shape 22"/>
           <p:cNvSpPr/>
           <p:nvPr/>
         </p:nvSpPr>
@@ -15776,7 +15891,7 @@
       </p:sp>
       <p:sp>
         <p:nvSpPr>
-          <p:cNvPr id="24" name="Shape 22"/>
+          <p:cNvPr id="25" name="Shape 23"/>
           <p:cNvSpPr/>
           <p:nvPr/>
         </p:nvSpPr>
@@ -15803,7 +15918,7 @@
       </p:sp>
       <p:sp>
         <p:nvSpPr>
-          <p:cNvPr id="25" name="Shape 23"/>
+          <p:cNvPr id="26" name="Shape 24"/>
           <p:cNvSpPr/>
           <p:nvPr/>
         </p:nvSpPr>
@@ -15823,7 +15938,7 @@
       </p:sp>
       <p:sp>
         <p:nvSpPr>
-          <p:cNvPr id="26" name="Text 24"/>
+          <p:cNvPr id="27" name="Text 25"/>
           <p:cNvSpPr/>
           <p:nvPr/>
         </p:nvSpPr>
@@ -15862,7 +15977,7 @@
       </p:sp>
       <p:sp>
         <p:nvSpPr>
-          <p:cNvPr id="27" name="Text 25"/>
+          <p:cNvPr id="28" name="Text 26"/>
           <p:cNvSpPr/>
           <p:nvPr/>
         </p:nvSpPr>
@@ -15901,7 +16016,7 @@
       </p:sp>
       <p:sp>
         <p:nvSpPr>
-          <p:cNvPr id="28" name="Shape 26"/>
+          <p:cNvPr id="29" name="Shape 27"/>
           <p:cNvSpPr/>
           <p:nvPr/>
         </p:nvSpPr>
@@ -15924,7 +16039,7 @@
       </p:sp>
       <p:sp>
         <p:nvSpPr>
-          <p:cNvPr id="29" name="Shape 27"/>
+          <p:cNvPr id="30" name="Shape 28"/>
           <p:cNvSpPr/>
           <p:nvPr/>
         </p:nvSpPr>
@@ -15951,7 +16066,7 @@
       </p:sp>
       <p:sp>
         <p:nvSpPr>
-          <p:cNvPr id="30" name="Shape 28"/>
+          <p:cNvPr id="31" name="Shape 29"/>
           <p:cNvSpPr/>
           <p:nvPr/>
         </p:nvSpPr>
@@ -15971,7 +16086,7 @@
       </p:sp>
       <p:sp>
         <p:nvSpPr>
-          <p:cNvPr id="31" name="Text 29"/>
+          <p:cNvPr id="32" name="Text 30"/>
           <p:cNvSpPr/>
           <p:nvPr/>
         </p:nvSpPr>
@@ -16010,7 +16125,7 @@
       </p:sp>
       <p:sp>
         <p:nvSpPr>
-          <p:cNvPr id="32" name="Text 30"/>
+          <p:cNvPr id="33" name="Text 31"/>
           <p:cNvSpPr/>
           <p:nvPr/>
         </p:nvSpPr>
@@ -16049,7 +16164,7 @@
       </p:sp>
       <p:sp>
         <p:nvSpPr>
-          <p:cNvPr id="33" name="Shape 31"/>
+          <p:cNvPr id="34" name="Shape 32"/>
           <p:cNvSpPr/>
           <p:nvPr/>
         </p:nvSpPr>
@@ -16072,7 +16187,7 @@
       </p:sp>
       <p:sp>
         <p:nvSpPr>
-          <p:cNvPr id="34" name="Shape 32"/>
+          <p:cNvPr id="35" name="Shape 33"/>
           <p:cNvSpPr/>
           <p:nvPr/>
         </p:nvSpPr>
@@ -16099,7 +16214,7 @@
       </p:sp>
       <p:sp>
         <p:nvSpPr>
-          <p:cNvPr id="35" name="Shape 33"/>
+          <p:cNvPr id="36" name="Shape 34"/>
           <p:cNvSpPr/>
           <p:nvPr/>
         </p:nvSpPr>
@@ -16119,7 +16234,7 @@
       </p:sp>
       <p:sp>
         <p:nvSpPr>
-          <p:cNvPr id="36" name="Text 34"/>
+          <p:cNvPr id="37" name="Text 35"/>
           <p:cNvSpPr/>
           <p:nvPr/>
         </p:nvSpPr>
@@ -16158,7 +16273,7 @@
       </p:sp>
       <p:sp>
         <p:nvSpPr>
-          <p:cNvPr id="37" name="Text 35"/>
+          <p:cNvPr id="38" name="Text 36"/>
           <p:cNvSpPr/>
           <p:nvPr/>
         </p:nvSpPr>
@@ -16197,7 +16312,7 @@
       </p:sp>
       <p:sp>
         <p:nvSpPr>
-          <p:cNvPr id="38" name="Shape 36"/>
+          <p:cNvPr id="39" name="Shape 37"/>
           <p:cNvSpPr/>
           <p:nvPr/>
         </p:nvSpPr>
@@ -16411,7 +16526,7 @@
                 <a:ea typeface="Georgia" pitchFamily="34" charset="-122"/>
                 <a:cs typeface="Georgia" pitchFamily="34" charset="-120"/>
               </a:rPr>
-              <a:t>Quando resistir FUNCIONA, a oposição vira estratégia: o TOD nasce como aprendizagem antes de virar rótulo.</a:t>
+              <a:t>Quando resistir FUNCIONA, a oposição vira comportamento aprendido: é assim que se arma o risco de transtorno opositivo-desafiador (TOD).</a:t>
             </a:r>
             <a:endParaRPr lang="en-US" sz="2300" dirty="0"/>
           </a:p>
@@ -18687,7 +18802,7 @@
                 <a:ea typeface="Calibri" pitchFamily="34" charset="-122"/>
                 <a:cs typeface="Calibri" pitchFamily="34" charset="-120"/>
               </a:rPr>
-              <a:t>curva de Kail: mais rápido</a:t>
+              <a:t>tempo de reação cai com a</a:t>
             </a:r>
             <a:endParaRPr lang="en-US" sz="1300" dirty="0"/>
           </a:p>
@@ -18704,7 +18819,7 @@
                 <a:ea typeface="Calibri" pitchFamily="34" charset="-122"/>
                 <a:cs typeface="Calibri" pitchFamily="34" charset="-120"/>
               </a:rPr>
-              <a:t>em qualquer cultura</a:t>
+              <a:t>idade (Kail), em qualquer cultura</a:t>
             </a:r>
             <a:endParaRPr lang="en-US" sz="1300" dirty="0"/>
           </a:p>
@@ -19589,12 +19704,12 @@
         </p:nvSpPr>
         <p:spPr>
           <a:xfrm>
-            <a:off x="822960" y="2514600"/>
-            <a:ext cx="2834640" cy="1051560"/>
+            <a:off x="822960" y="2468880"/>
+            <a:ext cx="2834640" cy="1005840"/>
           </a:xfrm>
           <a:prstGeom prst="roundRect">
             <a:avLst>
-              <a:gd name="adj" fmla="val 6087"/>
+              <a:gd name="adj" fmla="val 6364"/>
             </a:avLst>
           </a:prstGeom>
           <a:solidFill>
@@ -19649,12 +19764,12 @@
         </p:nvSpPr>
         <p:spPr>
           <a:xfrm>
-            <a:off x="3931920" y="2514600"/>
-            <a:ext cx="2834640" cy="1051560"/>
+            <a:off x="3931920" y="2468880"/>
+            <a:ext cx="2834640" cy="1005840"/>
           </a:xfrm>
           <a:prstGeom prst="roundRect">
             <a:avLst>
-              <a:gd name="adj" fmla="val 6087"/>
+              <a:gd name="adj" fmla="val 6364"/>
             </a:avLst>
           </a:prstGeom>
           <a:solidFill>
@@ -19709,12 +19824,12 @@
         </p:nvSpPr>
         <p:spPr>
           <a:xfrm>
-            <a:off x="7040880" y="2514600"/>
-            <a:ext cx="2834640" cy="1051560"/>
+            <a:off x="7040880" y="2468880"/>
+            <a:ext cx="2834640" cy="1005840"/>
           </a:xfrm>
           <a:prstGeom prst="roundRect">
             <a:avLst>
-              <a:gd name="adj" fmla="val 6087"/>
+              <a:gd name="adj" fmla="val 6364"/>
             </a:avLst>
           </a:prstGeom>
           <a:solidFill>
@@ -19763,7 +19878,46 @@
       </p:sp>
       <p:sp>
         <p:nvSpPr>
-          <p:cNvPr id="9" name="Shape 7"/>
+          <p:cNvPr id="9" name="Text 7"/>
+          <p:cNvSpPr/>
+          <p:nvPr/>
+        </p:nvSpPr>
+        <p:spPr>
+          <a:xfrm>
+            <a:off x="822960" y="3584448"/>
+            <a:ext cx="10515600" cy="320040"/>
+          </a:xfrm>
+          <a:prstGeom prst="rect">
+            <a:avLst/>
+          </a:prstGeom>
+          <a:noFill/>
+          <a:ln/>
+        </p:spPr>
+        <p:txBody>
+          <a:bodyPr wrap="square" rtlCol="0" anchor="t"/>
+          <a:lstStyle/>
+          <a:p>
+            <a:pPr indent="0" marL="0">
+              <a:buNone/>
+            </a:pPr>
+            <a:r>
+              <a:rPr lang="en-US" sz="1200" i="1" dirty="0">
+                <a:solidFill>
+                  <a:srgbClr val="8A6594"/>
+                </a:solidFill>
+                <a:latin typeface="Calibri" pitchFamily="34" charset="0"/>
+                <a:ea typeface="Calibri" pitchFamily="34" charset="-122"/>
+                <a:cs typeface="Calibri" pitchFamily="34" charset="-120"/>
+              </a:rPr>
+              <a:t>descentração = considerar mais de uma dimensão ao mesmo tempo; a compensação é ela em ação</a:t>
+            </a:r>
+            <a:endParaRPr lang="en-US" sz="1200" dirty="0"/>
+          </a:p>
+        </p:txBody>
+      </p:sp>
+      <p:sp>
+        <p:nvSpPr>
+          <p:cNvPr id="10" name="Shape 8"/>
           <p:cNvSpPr/>
           <p:nvPr/>
         </p:nvSpPr>
@@ -19790,7 +19944,7 @@
       </p:sp>
       <p:sp>
         <p:nvSpPr>
-          <p:cNvPr id="10" name="Text 8"/>
+          <p:cNvPr id="11" name="Text 9"/>
           <p:cNvSpPr/>
           <p:nvPr/>
         </p:nvSpPr>
@@ -19829,7 +19983,7 @@
       </p:sp>
       <p:sp>
         <p:nvSpPr>
-          <p:cNvPr id="11" name="Text 9"/>
+          <p:cNvPr id="12" name="Text 10"/>
           <p:cNvSpPr/>
           <p:nvPr/>
         </p:nvSpPr>
@@ -20658,8 +20812,8 @@
         </p:nvSpPr>
         <p:spPr>
           <a:xfrm>
-            <a:off x="8138160" y="3977640"/>
-            <a:ext cx="3108960" cy="365760"/>
+            <a:off x="8001000" y="3566160"/>
+            <a:ext cx="3291840" cy="365760"/>
           </a:xfrm>
           <a:prstGeom prst="rect">
             <a:avLst/>
@@ -20675,7 +20829,7 @@
               <a:buNone/>
             </a:pPr>
             <a:r>
-              <a:rPr lang="en-US" sz="1250" b="1" dirty="0">
+              <a:rPr lang="en-US" sz="1200" b="1" dirty="0">
                 <a:solidFill>
                   <a:srgbClr val="56365F"/>
                 </a:solidFill>
@@ -20683,9 +20837,9 @@
                 <a:ea typeface="Calibri" pitchFamily="34" charset="-122"/>
                 <a:cs typeface="Calibri" pitchFamily="34" charset="-120"/>
               </a:rPr>
-              <a:t>maturação do freio (contínua)</a:t>
-            </a:r>
-            <a:endParaRPr lang="en-US" sz="1250" dirty="0"/>
+              <a:t>freio típico (maturação contínua)</a:t>
+            </a:r>
+            <a:endParaRPr lang="en-US" sz="1200" dirty="0"/>
           </a:p>
         </p:txBody>
       </p:sp>
@@ -20697,8 +20851,110 @@
         </p:nvSpPr>
         <p:spPr>
           <a:xfrm>
+            <a:off x="1463040" y="5349240"/>
+            <a:ext cx="4023360" cy="-685800"/>
+          </a:xfrm>
+          <a:prstGeom prst="line">
+            <a:avLst/>
+          </a:prstGeom>
+          <a:noFill/>
+          <a:ln w="44450">
+            <a:solidFill>
+              <a:srgbClr val="8A6594"/>
+            </a:solidFill>
+            <a:prstDash val="dash"/>
+          </a:ln>
+        </p:spPr>
+      </p:sp>
+      <p:sp>
+        <p:nvSpPr>
+          <p:cNvPr id="13" name="Shape 11"/>
+          <p:cNvSpPr/>
+          <p:nvPr/>
+        </p:nvSpPr>
+        <p:spPr>
+          <a:xfrm>
+            <a:off x="5486400" y="4663440"/>
+            <a:ext cx="4846320" cy="-640080"/>
+          </a:xfrm>
+          <a:prstGeom prst="line">
+            <a:avLst/>
+          </a:prstGeom>
+          <a:noFill/>
+          <a:ln w="44450">
+            <a:solidFill>
+              <a:srgbClr val="8A6594"/>
+            </a:solidFill>
+            <a:prstDash val="dash"/>
+          </a:ln>
+        </p:spPr>
+      </p:sp>
+      <p:sp>
+        <p:nvSpPr>
+          <p:cNvPr id="14" name="Text 12"/>
+          <p:cNvSpPr/>
+          <p:nvPr/>
+        </p:nvSpPr>
+        <p:spPr>
+          <a:xfrm>
+            <a:off x="8001000" y="4892040"/>
+            <a:ext cx="3291840" cy="548640"/>
+          </a:xfrm>
+          <a:prstGeom prst="rect">
+            <a:avLst/>
+          </a:prstGeom>
+          <a:noFill/>
+          <a:ln/>
+        </p:spPr>
+        <p:txBody>
+          <a:bodyPr wrap="square" rtlCol="0" anchor="t"/>
+          <a:lstStyle/>
+          <a:p>
+            <a:pPr indent="0" marL="0">
+              <a:buNone/>
+            </a:pPr>
+            <a:r>
+              <a:rPr lang="en-US" sz="1150" b="1" dirty="0">
+                <a:solidFill>
+                  <a:srgbClr val="8A6594"/>
+                </a:solidFill>
+                <a:latin typeface="Calibri" pitchFamily="34" charset="0"/>
+                <a:ea typeface="Calibri" pitchFamily="34" charset="-122"/>
+                <a:cs typeface="Calibri" pitchFamily="34" charset="-120"/>
+              </a:rPr>
+              <a:t>freio TDAH: já era mais baixo antes;</a:t>
+            </a:r>
+            <a:endParaRPr lang="en-US" sz="1150" dirty="0"/>
+          </a:p>
+          <a:p>
+            <a:pPr indent="0" marL="0">
+              <a:buNone/>
+            </a:pPr>
+            <a:r>
+              <a:rPr lang="en-US" sz="1150" b="1" dirty="0">
+                <a:solidFill>
+                  <a:srgbClr val="8A6594"/>
+                </a:solidFill>
+                <a:latin typeface="Calibri" pitchFamily="34" charset="0"/>
+                <a:ea typeface="Calibri" pitchFamily="34" charset="-122"/>
+                <a:cs typeface="Calibri" pitchFamily="34" charset="-120"/>
+              </a:rPr>
+              <a:t>a escola só revelou</a:t>
+            </a:r>
+            <a:endParaRPr lang="en-US" sz="1150" dirty="0"/>
+          </a:p>
+        </p:txBody>
+      </p:sp>
+      <p:sp>
+        <p:nvSpPr>
+          <p:cNvPr id="15" name="Shape 13"/>
+          <p:cNvSpPr/>
+          <p:nvPr/>
+        </p:nvSpPr>
+        <p:spPr>
+          <a:xfrm>
             <a:off x="1463040" y="4846320"/>
-            <a:ext cx="3566160" cy="0"/>
+            <a:ext cx="1554480" cy="0"/>
           </a:xfrm>
           <a:prstGeom prst="line">
             <a:avLst/>
@@ -20714,14 +20970,14 @@
       </p:sp>
       <p:sp>
         <p:nvSpPr>
-          <p:cNvPr id="13" name="Shape 11"/>
-          <p:cNvSpPr/>
-          <p:nvPr/>
-        </p:nvSpPr>
-        <p:spPr>
-          <a:xfrm>
-            <a:off x="5029200" y="3017520"/>
-            <a:ext cx="0" cy="1828800"/>
+          <p:cNvPr id="16" name="Shape 14"/>
+          <p:cNvSpPr/>
+          <p:nvPr/>
+        </p:nvSpPr>
+        <p:spPr>
+          <a:xfrm>
+            <a:off x="3017520" y="4572000"/>
+            <a:ext cx="0" cy="274320"/>
           </a:xfrm>
           <a:prstGeom prst="line">
             <a:avLst/>
@@ -20737,14 +20993,14 @@
       </p:sp>
       <p:sp>
         <p:nvSpPr>
-          <p:cNvPr id="14" name="Shape 12"/>
-          <p:cNvSpPr/>
-          <p:nvPr/>
-        </p:nvSpPr>
-        <p:spPr>
-          <a:xfrm>
-            <a:off x="5029200" y="3017520"/>
-            <a:ext cx="5303520" cy="-274320"/>
+          <p:cNvPr id="17" name="Shape 15"/>
+          <p:cNvSpPr/>
+          <p:nvPr/>
+        </p:nvSpPr>
+        <p:spPr>
+          <a:xfrm>
+            <a:off x="3017520" y="4572000"/>
+            <a:ext cx="2011680" cy="0"/>
           </a:xfrm>
           <a:prstGeom prst="line">
             <a:avLst/>
@@ -20760,14 +21016,60 @@
       </p:sp>
       <p:sp>
         <p:nvSpPr>
-          <p:cNvPr id="15" name="Text 13"/>
-          <p:cNvSpPr/>
-          <p:nvPr/>
-        </p:nvSpPr>
-        <p:spPr>
-          <a:xfrm>
-            <a:off x="5486400" y="2395728"/>
-            <a:ext cx="3291840" cy="365760"/>
+          <p:cNvPr id="18" name="Shape 16"/>
+          <p:cNvSpPr/>
+          <p:nvPr/>
+        </p:nvSpPr>
+        <p:spPr>
+          <a:xfrm>
+            <a:off x="5029200" y="3017520"/>
+            <a:ext cx="0" cy="1554480"/>
+          </a:xfrm>
+          <a:prstGeom prst="line">
+            <a:avLst/>
+          </a:prstGeom>
+          <a:noFill/>
+          <a:ln w="50800">
+            <a:solidFill>
+              <a:srgbClr val="E96030"/>
+            </a:solidFill>
+            <a:prstDash val="solid"/>
+          </a:ln>
+        </p:spPr>
+      </p:sp>
+      <p:sp>
+        <p:nvSpPr>
+          <p:cNvPr id="19" name="Shape 17"/>
+          <p:cNvSpPr/>
+          <p:nvPr/>
+        </p:nvSpPr>
+        <p:spPr>
+          <a:xfrm>
+            <a:off x="5029200" y="3017520"/>
+            <a:ext cx="5303520" cy="-274320"/>
+          </a:xfrm>
+          <a:prstGeom prst="line">
+            <a:avLst/>
+          </a:prstGeom>
+          <a:noFill/>
+          <a:ln w="50800">
+            <a:solidFill>
+              <a:srgbClr val="E96030"/>
+            </a:solidFill>
+            <a:prstDash val="solid"/>
+          </a:ln>
+        </p:spPr>
+      </p:sp>
+      <p:sp>
+        <p:nvSpPr>
+          <p:cNvPr id="20" name="Text 18"/>
+          <p:cNvSpPr/>
+          <p:nvPr/>
+        </p:nvSpPr>
+        <p:spPr>
+          <a:xfrm>
+            <a:off x="5257800" y="2395728"/>
+            <a:ext cx="4023360" cy="365760"/>
           </a:xfrm>
           <a:prstGeom prst="rect">
             <a:avLst/>
@@ -20791,7 +21093,7 @@
                 <a:ea typeface="Calibri" pitchFamily="34" charset="-122"/>
                 <a:cs typeface="Calibri" pitchFamily="34" charset="-120"/>
               </a:rPr>
-              <a:t>demanda por autorregulação</a:t>
+              <a:t>demanda por autorregulação (escada)</a:t>
             </a:r>
             <a:endParaRPr lang="en-US" sz="1250" dirty="0"/>
           </a:p>
@@ -20799,7 +21101,46 @@
       </p:sp>
       <p:sp>
         <p:nvSpPr>
-          <p:cNvPr id="16" name="Text 14"/>
+          <p:cNvPr id="21" name="Text 19"/>
+          <p:cNvSpPr/>
+          <p:nvPr/>
+        </p:nvSpPr>
+        <p:spPr>
+          <a:xfrm>
+            <a:off x="3063240" y="4645152"/>
+            <a:ext cx="1645920" cy="274320"/>
+          </a:xfrm>
+          <a:prstGeom prst="rect">
+            <a:avLst/>
+          </a:prstGeom>
+          <a:noFill/>
+          <a:ln/>
+        </p:spPr>
+        <p:txBody>
+          <a:bodyPr wrap="square" rtlCol="0" anchor="t"/>
+          <a:lstStyle/>
+          <a:p>
+            <a:pPr indent="0" marL="0">
+              <a:buNone/>
+            </a:pPr>
+            <a:r>
+              <a:rPr lang="en-US" sz="1050" dirty="0">
+                <a:solidFill>
+                  <a:srgbClr val="B84A1F"/>
+                </a:solidFill>
+                <a:latin typeface="Calibri" pitchFamily="34" charset="0"/>
+                <a:ea typeface="Calibri" pitchFamily="34" charset="-122"/>
+                <a:cs typeface="Calibri" pitchFamily="34" charset="-120"/>
+              </a:rPr>
+              <a:t>pré-escola</a:t>
+            </a:r>
+            <a:endParaRPr lang="en-US" sz="1050" dirty="0"/>
+          </a:p>
+        </p:txBody>
+      </p:sp>
+      <p:sp>
+        <p:nvSpPr>
+          <p:cNvPr id="22" name="Text 20"/>
           <p:cNvSpPr/>
           <p:nvPr/>
         </p:nvSpPr>
@@ -20838,7 +21179,7 @@
       </p:sp>
       <p:sp>
         <p:nvSpPr>
-          <p:cNvPr id="17" name="Shape 15"/>
+          <p:cNvPr id="23" name="Shape 21"/>
           <p:cNvSpPr/>
           <p:nvPr/>
         </p:nvSpPr>
@@ -20860,7 +21201,7 @@
       </p:sp>
       <p:sp>
         <p:nvSpPr>
-          <p:cNvPr id="18" name="Text 16"/>
+          <p:cNvPr id="24" name="Text 22"/>
           <p:cNvSpPr/>
           <p:nvPr/>
         </p:nvSpPr>
@@ -20916,7 +21257,7 @@
       </p:sp>
       <p:sp>
         <p:nvSpPr>
-          <p:cNvPr id="19" name="Text 17"/>
+          <p:cNvPr id="25" name="Text 23"/>
           <p:cNvSpPr/>
           <p:nvPr/>
         </p:nvSpPr>
@@ -25703,7 +26044,7 @@
                 <a:ea typeface="Georgia" pitchFamily="34" charset="-122"/>
                 <a:cs typeface="Georgia" pitchFamily="34" charset="-120"/>
               </a:rPr>
-              <a:t>A moral sai da heteronomia: perto dos 8, a regra deixa de ser sagrada e a intenção passa a contar.</a:t>
+              <a:t>A moral sai da heteronomia: entre os 7 e os 10, a regra deixa de ser sagrada e a intenção passa a contar.</a:t>
             </a:r>
             <a:endParaRPr lang="en-US" sz="2100" dirty="0"/>
           </a:p>
@@ -26297,8 +26638,8 @@
         </p:nvSpPr>
         <p:spPr>
           <a:xfrm>
-            <a:off x="822960" y="3429000"/>
-            <a:ext cx="10515600" cy="457200"/>
+            <a:off x="822960" y="3383280"/>
+            <a:ext cx="10515600" cy="594360"/>
           </a:xfrm>
           <a:prstGeom prst="rect">
             <a:avLst/>
@@ -26314,7 +26655,7 @@
               <a:buNone/>
             </a:pPr>
             <a:r>
-              <a:rPr lang="en-US" sz="1500" i="1" dirty="0">
+              <a:rPr lang="en-US" sz="1350" i="1" dirty="0">
                 <a:solidFill>
                   <a:srgbClr val="56365F"/>
                 </a:solidFill>
@@ -26322,9 +26663,9 @@
                 <a:ea typeface="Calibri" pitchFamily="34" charset="-122"/>
                 <a:cs typeface="Calibri" pitchFamily="34" charset="-120"/>
               </a:rPr>
-              <a:t>a moeda da aceitação é exatamente o que os atos anteriores construíram: regular a expressão emocional + ler mentes</a:t>
-            </a:r>
-            <a:endParaRPr lang="en-US" sz="1500" dirty="0"/>
+              <a:t>negligenciada = ignorada PELOS PARES, sem rejeição ativa (não confundir com negligência parental). A moeda da aceitação é o que os atos anteriores construíram: regular a expressão emocional + ler mentes.</a:t>
+            </a:r>
+            <a:endParaRPr lang="en-US" sz="1350" dirty="0"/>
           </a:p>
         </p:txBody>
       </p:sp>
@@ -29903,7 +30244,46 @@
       </p:sp>
       <p:sp>
         <p:nvSpPr>
-          <p:cNvPr id="19" name="Shape 17"/>
+          <p:cNvPr id="19" name="Text 17"/>
+          <p:cNvSpPr/>
+          <p:nvPr/>
+        </p:nvSpPr>
+        <p:spPr>
+          <a:xfrm>
+            <a:off x="1280160" y="5166360"/>
+            <a:ext cx="9601200" cy="320040"/>
+          </a:xfrm>
+          <a:prstGeom prst="rect">
+            <a:avLst/>
+          </a:prstGeom>
+          <a:noFill/>
+          <a:ln/>
+        </p:spPr>
+        <p:txBody>
+          <a:bodyPr wrap="square" rtlCol="0" anchor="t"/>
+          <a:lstStyle/>
+          <a:p>
+            <a:pPr indent="0" marL="0">
+              <a:buNone/>
+            </a:pPr>
+            <a:r>
+              <a:rPr lang="en-US" sz="1200" i="1" dirty="0">
+                <a:solidFill>
+                  <a:srgbClr val="B84A1F"/>
+                </a:solidFill>
+                <a:latin typeface="Calibri" pitchFamily="34" charset="0"/>
+                <a:ea typeface="Calibri" pitchFamily="34" charset="-122"/>
+                <a:cs typeface="Calibri" pitchFamily="34" charset="-120"/>
+              </a:rPr>
+              <a:t>posição no mapa = etapa da transferência que costuma falhar, NÃO idade de início</a:t>
+            </a:r>
+            <a:endParaRPr lang="en-US" sz="1200" dirty="0"/>
+          </a:p>
+        </p:txBody>
+      </p:sp>
+      <p:sp>
+        <p:nvSpPr>
+          <p:cNvPr id="20" name="Shape 18"/>
           <p:cNvSpPr/>
           <p:nvPr/>
         </p:nvSpPr>
@@ -29930,7 +30310,7 @@
       </p:sp>
       <p:sp>
         <p:nvSpPr>
-          <p:cNvPr id="20" name="Shape 18"/>
+          <p:cNvPr id="21" name="Shape 19"/>
           <p:cNvSpPr/>
           <p:nvPr/>
         </p:nvSpPr>
@@ -29950,7 +30330,7 @@
       </p:sp>
       <p:sp>
         <p:nvSpPr>
-          <p:cNvPr id="21" name="Text 19"/>
+          <p:cNvPr id="22" name="Text 20"/>
           <p:cNvSpPr/>
           <p:nvPr/>
         </p:nvSpPr>
@@ -29989,7 +30369,7 @@
       </p:sp>
       <p:sp>
         <p:nvSpPr>
-          <p:cNvPr id="22" name="Text 20"/>
+          <p:cNvPr id="23" name="Text 21"/>
           <p:cNvSpPr/>
           <p:nvPr/>
         </p:nvSpPr>
@@ -30028,7 +30408,7 @@
       </p:sp>
       <p:sp>
         <p:nvSpPr>
-          <p:cNvPr id="23" name="Shape 21"/>
+          <p:cNvPr id="24" name="Shape 22"/>
           <p:cNvSpPr/>
           <p:nvPr/>
         </p:nvSpPr>
@@ -30051,7 +30431,7 @@
       </p:sp>
       <p:sp>
         <p:nvSpPr>
-          <p:cNvPr id="24" name="Shape 22"/>
+          <p:cNvPr id="25" name="Shape 23"/>
           <p:cNvSpPr/>
           <p:nvPr/>
         </p:nvSpPr>
@@ -30078,7 +30458,7 @@
       </p:sp>
       <p:sp>
         <p:nvSpPr>
-          <p:cNvPr id="25" name="Shape 23"/>
+          <p:cNvPr id="26" name="Shape 24"/>
           <p:cNvSpPr/>
           <p:nvPr/>
         </p:nvSpPr>
@@ -30098,7 +30478,7 @@
       </p:sp>
       <p:sp>
         <p:nvSpPr>
-          <p:cNvPr id="26" name="Text 24"/>
+          <p:cNvPr id="27" name="Text 25"/>
           <p:cNvSpPr/>
           <p:nvPr/>
         </p:nvSpPr>
@@ -30137,7 +30517,7 @@
       </p:sp>
       <p:sp>
         <p:nvSpPr>
-          <p:cNvPr id="27" name="Text 25"/>
+          <p:cNvPr id="28" name="Text 26"/>
           <p:cNvSpPr/>
           <p:nvPr/>
         </p:nvSpPr>
@@ -30176,7 +30556,7 @@
       </p:sp>
       <p:sp>
         <p:nvSpPr>
-          <p:cNvPr id="28" name="Shape 26"/>
+          <p:cNvPr id="29" name="Shape 27"/>
           <p:cNvSpPr/>
           <p:nvPr/>
         </p:nvSpPr>
@@ -30199,7 +30579,7 @@
       </p:sp>
       <p:sp>
         <p:nvSpPr>
-          <p:cNvPr id="29" name="Shape 27"/>
+          <p:cNvPr id="30" name="Shape 28"/>
           <p:cNvSpPr/>
           <p:nvPr/>
         </p:nvSpPr>
@@ -30226,7 +30606,7 @@
       </p:sp>
       <p:sp>
         <p:nvSpPr>
-          <p:cNvPr id="30" name="Shape 28"/>
+          <p:cNvPr id="31" name="Shape 29"/>
           <p:cNvSpPr/>
           <p:nvPr/>
         </p:nvSpPr>
@@ -30246,7 +30626,7 @@
       </p:sp>
       <p:sp>
         <p:nvSpPr>
-          <p:cNvPr id="31" name="Text 29"/>
+          <p:cNvPr id="32" name="Text 30"/>
           <p:cNvSpPr/>
           <p:nvPr/>
         </p:nvSpPr>
@@ -30285,7 +30665,7 @@
       </p:sp>
       <p:sp>
         <p:nvSpPr>
-          <p:cNvPr id="32" name="Text 30"/>
+          <p:cNvPr id="33" name="Text 31"/>
           <p:cNvSpPr/>
           <p:nvPr/>
         </p:nvSpPr>
@@ -30324,7 +30704,7 @@
       </p:sp>
       <p:sp>
         <p:nvSpPr>
-          <p:cNvPr id="33" name="Shape 31"/>
+          <p:cNvPr id="34" name="Shape 32"/>
           <p:cNvSpPr/>
           <p:nvPr/>
         </p:nvSpPr>
@@ -30347,7 +30727,7 @@
       </p:sp>
       <p:sp>
         <p:nvSpPr>
-          <p:cNvPr id="34" name="Shape 32"/>
+          <p:cNvPr id="35" name="Shape 33"/>
           <p:cNvSpPr/>
           <p:nvPr/>
         </p:nvSpPr>
@@ -30374,7 +30754,7 @@
       </p:sp>
       <p:sp>
         <p:nvSpPr>
-          <p:cNvPr id="35" name="Shape 33"/>
+          <p:cNvPr id="36" name="Shape 34"/>
           <p:cNvSpPr/>
           <p:nvPr/>
         </p:nvSpPr>
@@ -30394,7 +30774,7 @@
       </p:sp>
       <p:sp>
         <p:nvSpPr>
-          <p:cNvPr id="36" name="Text 34"/>
+          <p:cNvPr id="37" name="Text 35"/>
           <p:cNvSpPr/>
           <p:nvPr/>
         </p:nvSpPr>
@@ -30433,7 +30813,7 @@
       </p:sp>
       <p:sp>
         <p:nvSpPr>
-          <p:cNvPr id="37" name="Text 35"/>
+          <p:cNvPr id="38" name="Text 36"/>
           <p:cNvSpPr/>
           <p:nvPr/>
         </p:nvSpPr>
@@ -30472,7 +30852,7 @@
       </p:sp>
       <p:sp>
         <p:nvSpPr>
-          <p:cNvPr id="38" name="Shape 36"/>
+          <p:cNvPr id="39" name="Shape 37"/>
           <p:cNvSpPr/>
           <p:nvPr/>
         </p:nvSpPr>
@@ -30495,7 +30875,7 @@
       </p:sp>
       <p:sp>
         <p:nvSpPr>
-          <p:cNvPr id="39" name="Text 37"/>
+          <p:cNvPr id="40" name="Text 38"/>
           <p:cNvSpPr/>
           <p:nvPr/>
         </p:nvSpPr>
@@ -30534,7 +30914,7 @@
       </p:sp>
       <p:sp>
         <p:nvSpPr>
-          <p:cNvPr id="40" name="Text 38"/>
+          <p:cNvPr id="41" name="Text 39"/>
           <p:cNvSpPr/>
           <p:nvPr/>
         </p:nvSpPr>
@@ -30577,7 +30957,7 @@
       </p:sp>
       <p:sp>
         <p:nvSpPr>
-          <p:cNvPr id="41" name="Shape 39"/>
+          <p:cNvPr id="42" name="Shape 40"/>
           <p:cNvSpPr/>
           <p:nvPr/>
         </p:nvSpPr>
@@ -30601,7 +30981,7 @@
       </p:sp>
       <p:sp>
         <p:nvSpPr>
-          <p:cNvPr id="42" name="Text 40"/>
+          <p:cNvPr id="43" name="Text 41"/>
           <p:cNvSpPr/>
           <p:nvPr/>
         </p:nvSpPr>
@@ -30644,7 +31024,7 @@
       </p:sp>
       <p:sp>
         <p:nvSpPr>
-          <p:cNvPr id="43" name="Shape 41"/>
+          <p:cNvPr id="44" name="Shape 42"/>
           <p:cNvSpPr/>
           <p:nvPr/>
         </p:nvSpPr>
@@ -30668,7 +31048,7 @@
       </p:sp>
       <p:sp>
         <p:nvSpPr>
-          <p:cNvPr id="44" name="Text 42"/>
+          <p:cNvPr id="45" name="Text 43"/>
           <p:cNvSpPr/>
           <p:nvPr/>
         </p:nvSpPr>
@@ -30711,7 +31091,7 @@
       </p:sp>
       <p:sp>
         <p:nvSpPr>
-          <p:cNvPr id="45" name="Shape 43"/>
+          <p:cNvPr id="46" name="Shape 44"/>
           <p:cNvSpPr/>
           <p:nvPr/>
         </p:nvSpPr>
@@ -30735,7 +31115,7 @@
       </p:sp>
       <p:sp>
         <p:nvSpPr>
-          <p:cNvPr id="46" name="Text 44"/>
+          <p:cNvPr id="47" name="Text 45"/>
           <p:cNvSpPr/>
           <p:nvPr/>
         </p:nvSpPr>
@@ -33145,12 +33525,12 @@
         </p:nvSpPr>
         <p:spPr>
           <a:xfrm>
-            <a:off x="640080" y="5806440"/>
-            <a:ext cx="10881360" cy="640080"/>
+            <a:off x="640080" y="5623560"/>
+            <a:ext cx="10881360" cy="868680"/>
           </a:xfrm>
           <a:prstGeom prst="roundRect">
             <a:avLst>
-              <a:gd name="adj" fmla="val 10000"/>
+              <a:gd name="adj" fmla="val 7368"/>
             </a:avLst>
           </a:prstGeom>
           <a:solidFill>
@@ -33172,8 +33552,8 @@
         </p:nvSpPr>
         <p:spPr>
           <a:xfrm>
-            <a:off x="914400" y="5943600"/>
-            <a:ext cx="10332720" cy="411480"/>
+            <a:off x="914400" y="5760720"/>
+            <a:ext cx="10332720" cy="640080"/>
           </a:xfrm>
           <a:prstGeom prst="rect">
             <a:avLst/>
@@ -33189,7 +33569,7 @@
               <a:buNone/>
             </a:pPr>
             <a:r>
-              <a:rPr lang="en-US" sz="1400" b="1" dirty="0">
+              <a:rPr lang="en-US" sz="1300" dirty="0">
                 <a:solidFill>
                   <a:srgbClr val="56365F"/>
                 </a:solidFill>
@@ -33197,9 +33577,9 @@
                 <a:ea typeface="Calibri" pitchFamily="34" charset="-122"/>
                 <a:cs typeface="Calibri" pitchFamily="34" charset="-120"/>
               </a:rPr>
-              <a:t>Documento de apoio completo (com páginas, scripts e ressalvas) disponível na plataforma.</a:t>
-            </a:r>
-            <a:endParaRPr lang="en-US" sz="1400" dirty="0"/>
+              <a:t>Documento de apoio completo (páginas, scripts e ressalvas) na plataforma. Aprofundamento no apêndice: A anatomia da birra · B as duas curvas do TDAH · C falsa crença · D perguntas frequentes.</a:t>
+            </a:r>
+            <a:endParaRPr lang="en-US" sz="1300" dirty="0"/>
           </a:p>
         </p:txBody>
       </p:sp>
